--- a/ppt/2026-10-19_H5039001_S_BR9480CC.pptx
+++ b/ppt/2026-10-19_H5039001_S_BR9480CC.pptx
@@ -1855,7 +1855,7 @@
                 <a:ea typeface="Microsoft JhengHei" pitchFamily="34" charset="-122"/>
                 <a:cs typeface="Microsoft JhengHei" pitchFamily="34" charset="-120"/>
               </a:rPr>
-              <a:t>📢 「巔峰版 Series 9 Pro+</a:t>
+              <a:t>📢 「巔峰版 Series 9 Pro+ ｜ 一刮即淨 99.9%殺菌 潔淨剃鬚體驗」718,113（2 年前）；「How to Use your Braun Series 9 Pro+ Electric Shaver」49,390（8 個月前）——Braun Series 9 Pro+ 官方片 71.8 萬 views（2年前）＋官方使用教學 4.9 萬（8個月前），旗艦電鬚刨品牌認知高</a:t>
             </a:r>
             <a:endParaRPr lang="en-US" sz="950" dirty="0"/>
           </a:p>
